--- a/Lectures/py_lec_6.pptx
+++ b/Lectures/py_lec_6.pptx
@@ -9619,7 +9619,7 @@
         <p:spPr>
           <a:xfrm>
             <a:off x="445194" y="241680"/>
-            <a:ext cx="7318580" cy="694146"/>
+            <a:ext cx="8794056" cy="694146"/>
           </a:xfrm>
           <a:prstGeom prst="rect">
             <a:avLst/>
@@ -9639,8 +9639,23 @@
                 </a:solidFill>
                 <a:latin typeface="+mn-lt"/>
               </a:rPr>
-              <a:t>Генераторы</a:t>
-            </a:r>
+              <a:t>Менеджер контекста (</a:t>
+            </a:r>
+            <a:r>
+              <a:rPr lang="en-US" sz="3200" b="1" dirty="0">
+                <a:solidFill>
+                  <a:schemeClr val="accent1"/>
+                </a:solidFill>
+                <a:latin typeface="+mn-lt"/>
+              </a:rPr>
+              <a:t>context manager)</a:t>
+            </a:r>
+            <a:endParaRPr lang="ru-RU" sz="3200" b="1" dirty="0">
+              <a:solidFill>
+                <a:schemeClr val="accent1"/>
+              </a:solidFill>
+              <a:latin typeface="+mn-lt"/>
+            </a:endParaRPr>
           </a:p>
         </p:txBody>
       </p:sp>
